--- a/deliverables/business/zimlivestock-md-pitch.pptx
+++ b/deliverables/business/zimlivestock-md-pitch.pptx
@@ -1985,7 +1985,7 @@
                 <a:ea typeface="Georgia" pitchFamily="34" charset="-122"/>
                 <a:cs typeface="Georgia" pitchFamily="34" charset="-120"/>
               </a:rPr>
-              <a:t>A professional-service product for Zimbabwean livestock auction houses, built on the Paynow ecosystem.</a:t>
+              <a:t>A scaling B2B SaaS platform for Zimbabwean livestock auction houses, built on the Paynow ecosystem — B2B today, consumer transport tomorrow.</a:t>
             </a:r>
             <a:endParaRPr lang="en-US" sz="2200" dirty="0"/>
           </a:p>
@@ -2273,7 +2273,7 @@
                 <a:ea typeface="Calibri" pitchFamily="34" charset="-122"/>
                 <a:cs typeface="Calibri" pitchFamily="34" charset="-120"/>
               </a:rPr>
-              <a:t>DEPLOYMENT</a:t>
+              <a:t>ONBOARDING</a:t>
             </a:r>
             <a:endParaRPr lang="en-US" sz="1000" dirty="0"/>
           </a:p>
@@ -2312,7 +2312,7 @@
                 <a:ea typeface="Georgia" pitchFamily="34" charset="-122"/>
                 <a:cs typeface="Georgia" pitchFamily="34" charset="-120"/>
               </a:rPr>
-              <a:t>$5,000</a:t>
+              <a:t>$1,000</a:t>
             </a:r>
             <a:endParaRPr lang="en-US" sz="2800" dirty="0"/>
           </a:p>
@@ -2351,7 +2351,7 @@
                 <a:ea typeface="Calibri" pitchFamily="34" charset="-122"/>
                 <a:cs typeface="Calibri" pitchFamily="34" charset="-120"/>
               </a:rPr>
-              <a:t>discounted from $8k list</a:t>
+              <a:t>credited toward tier on conversion</a:t>
             </a:r>
             <a:endParaRPr lang="en-US" sz="1000" dirty="0"/>
           </a:p>
@@ -2417,7 +2417,7 @@
                 <a:ea typeface="Calibri" pitchFamily="34" charset="-122"/>
                 <a:cs typeface="Calibri" pitchFamily="34" charset="-120"/>
               </a:rPr>
-              <a:t>RETAINER</a:t>
+              <a:t>SUBSCRIPTION</a:t>
             </a:r>
             <a:endParaRPr lang="en-US" sz="1000" dirty="0"/>
           </a:p>
@@ -2456,7 +2456,7 @@
                 <a:ea typeface="Georgia" pitchFamily="34" charset="-122"/>
                 <a:cs typeface="Georgia" pitchFamily="34" charset="-120"/>
               </a:rPr>
-              <a:t>$1,200</a:t>
+              <a:t>$1,000</a:t>
             </a:r>
             <a:endParaRPr lang="en-US" sz="2800" dirty="0"/>
           </a:p>
@@ -2495,7 +2495,7 @@
                 <a:ea typeface="Calibri" pitchFamily="34" charset="-122"/>
                 <a:cs typeface="Calibri" pitchFamily="34" charset="-120"/>
               </a:rPr>
-              <a:t>/month, month-to-month for pilot</a:t>
+              <a:t>/month for the 90-day pilot</a:t>
             </a:r>
             <a:endParaRPr lang="en-US" sz="1000" dirty="0"/>
           </a:p>
@@ -2561,7 +2561,7 @@
                 <a:ea typeface="Calibri" pitchFamily="34" charset="-122"/>
                 <a:cs typeface="Calibri" pitchFamily="34" charset="-120"/>
               </a:rPr>
-              <a:t>SURCHARGE</a:t>
+              <a:t>TX TAKE</a:t>
             </a:r>
             <a:endParaRPr lang="en-US" sz="1000" dirty="0"/>
           </a:p>
@@ -3015,7 +3015,7 @@
                 <a:ea typeface="Georgia" pitchFamily="34" charset="-122"/>
                 <a:cs typeface="Georgia" pitchFamily="34" charset="-120"/>
               </a:rPr>
-              <a:t>Ops capacity bottlenecks before sales does</a:t>
+              <a:t>Landing 3 of ~8 Tier A anchors in Year 1</a:t>
             </a:r>
             <a:endParaRPr lang="en-US" sz="1300" dirty="0"/>
           </a:p>
@@ -3054,7 +3054,7 @@
                 <a:ea typeface="Calibri" pitchFamily="34" charset="-122"/>
                 <a:cs typeface="Calibri" pitchFamily="34" charset="-120"/>
               </a:rPr>
-              <a:t>Hire ops lead by engagement #2, not #4. Don't sell what we can't run.</a:t>
+              <a:t>The most aggressive assumption. Anchors-first GTM + a thin Y1 surplus and a 2–3 month buffer absorb a slow start.</a:t>
             </a:r>
             <a:endParaRPr lang="en-US" sz="1200" dirty="0"/>
           </a:p>
@@ -3116,7 +3116,7 @@
                 <a:ea typeface="Georgia" pitchFamily="34" charset="-122"/>
                 <a:cs typeface="Georgia" pitchFamily="34" charset="-120"/>
               </a:rPr>
-              <a:t>Paynow channel goes cold</a:t>
+              <a:t>Onboarding stays bespoke labor, capping scale</a:t>
             </a:r>
             <a:endParaRPr lang="en-US" sz="1300" dirty="0"/>
           </a:p>
@@ -3155,7 +3155,7 @@
                 <a:ea typeface="Calibri" pitchFamily="34" charset="-122"/>
                 <a:cs typeface="Calibri" pitchFamily="34" charset="-120"/>
               </a:rPr>
-              <a:t>Multi-rail product — EcoCash USSD direct + Stripe diaspora as fallback.</a:t>
+              <a:t>Self-serve wizard: /operators → admin approval → ~6-min RLS tenant. The 10th house costs roughly what the 2nd did.</a:t>
             </a:r>
             <a:endParaRPr lang="en-US" sz="1200" dirty="0"/>
           </a:p>
@@ -3217,7 +3217,7 @@
                 <a:ea typeface="Georgia" pitchFamily="34" charset="-122"/>
                 <a:cs typeface="Georgia" pitchFamily="34" charset="-120"/>
               </a:rPr>
-              <a:t>First customer churns publicly</a:t>
+              <a:t>Paynow channel goes cold</a:t>
             </a:r>
             <a:endParaRPr lang="en-US" sz="1300" dirty="0"/>
           </a:p>
@@ -3256,7 +3256,7 @@
                 <a:ea typeface="Calibri" pitchFamily="34" charset="-122"/>
                 <a:cs typeface="Calibri" pitchFamily="34" charset="-120"/>
               </a:rPr>
-              <a:t>High-touch first 3 months is non-negotiable. Treat #1 like a founding investor.</a:t>
+              <a:t>Multi-rail product — EcoCash USSD direct + Stripe diaspora as fallback.</a:t>
             </a:r>
             <a:endParaRPr lang="en-US" sz="1200" dirty="0"/>
           </a:p>
@@ -3318,7 +3318,7 @@
                 <a:ea typeface="Georgia" pitchFamily="34" charset="-122"/>
                 <a:cs typeface="Georgia" pitchFamily="34" charset="-120"/>
               </a:rPr>
-              <a:t>Founder runs everything until burnout</a:t>
+              <a:t>Adoption runs hotter than we forecast</a:t>
             </a:r>
             <a:endParaRPr lang="en-US" sz="1300" dirty="0"/>
           </a:p>
@@ -3357,7 +3357,7 @@
                 <a:ea typeface="Calibri" pitchFamily="34" charset="-122"/>
                 <a:cs typeface="Calibri" pitchFamily="34" charset="-120"/>
               </a:rPr>
-              <a:t>Hire ops + BD by engagement #3. Founder on Tier A only by month 12.</a:t>
+              <a:t>We hold it field-honest (10.5–13.7%, below the ~15% ceiling). Growth rides on house count + transport, not an adoption bet.</a:t>
             </a:r>
             <a:endParaRPr lang="en-US" sz="1200" dirty="0"/>
           </a:p>
@@ -3458,7 +3458,7 @@
                 <a:ea typeface="Calibri" pitchFamily="34" charset="-122"/>
                 <a:cs typeface="Calibri" pitchFamily="34" charset="-120"/>
               </a:rPr>
-              <a:t>All pricing in USD. Tx surcharge invoiced in USD equiv of ZIG/ZWL settled.</a:t>
+              <a:t>All pricing in USD. Tx take invoiced in USD equiv of ZIG/ZWL settled.</a:t>
             </a:r>
             <a:endParaRPr lang="en-US" sz="1200" dirty="0"/>
           </a:p>
@@ -3669,7 +3669,7 @@
                 <a:ea typeface="Georgia" pitchFamily="34" charset="-122"/>
                 <a:cs typeface="Georgia" pitchFamily="34" charset="-120"/>
               </a:rPr>
-              <a:t>There are roughly 50 livestock auction houses in Zimbabwe.  </a:t>
+              <a:t>There are roughly 40–60 livestock auction houses in Zimbabwe, and 3 of 4 national livestock-digitization initiatives have no settlement layer.  </a:t>
             </a:r>
             <a:pPr indent="0" marL="0">
               <a:spcAft>
@@ -3686,7 +3686,7 @@
                 <a:ea typeface="Georgia" pitchFamily="34" charset="-122"/>
                 <a:cs typeface="Georgia" pitchFamily="34" charset="-120"/>
               </a:rPr>
-              <a:t>None of them have a digital floor that runs under their own brand, with Paynow settlement built in.  </a:t>
+              <a:t>We are that layer: a branded digital floor with Paynow settlement built in, onboarded house-by-house through a self-serve wizard.  </a:t>
             </a:r>
             <a:pPr indent="0" marL="0">
               <a:spcAft>
@@ -3703,7 +3703,7 @@
                 <a:ea typeface="Georgia" pitchFamily="34" charset="-122"/>
                 <a:cs typeface="Georgia" pitchFamily="34" charset="-120"/>
               </a:rPr>
-              <a:t>We have one — already shipping — and we can deploy it for them, train their team, and run it on their behalf.  </a:t>
+              <a:t>It's already shipping. The 5-year plan reaches 20 houses — about a third of the market — for $1.03M revenue and a $346,583 cumulative surplus, self-funded.  </a:t>
             </a:r>
             <a:pPr indent="0" marL="0">
               <a:spcAft>
@@ -3737,7 +3737,7 @@
                 <a:ea typeface="Georgia" pitchFamily="34" charset="-122"/>
                 <a:cs typeface="Georgia" pitchFamily="34" charset="-120"/>
               </a:rPr>
-              <a:t>one pilot engagement, $5,000 plus a $1,200 monthly retainer, </a:t>
+              <a:t>one 90-day pilot, $1,000 onboarding (credited on conversion) plus a $1,000 monthly subscription, </a:t>
             </a:r>
             <a:pPr indent="0" marL="0">
               <a:spcAft>
@@ -3754,7 +3754,7 @@
                 <a:ea typeface="Georgia" pitchFamily="34" charset="-122"/>
                 <a:cs typeface="Georgia" pitchFamily="34" charset="-120"/>
               </a:rPr>
-              <a:t>to prove the playbook.  Three engagements take us to break-even.  Six take us to default-alive.</a:t>
+              <a:t>to land the first anchor and prove the playbook.</a:t>
             </a:r>
             <a:endParaRPr lang="en-US" sz="1700" dirty="0"/>
           </a:p>
@@ -4957,7 +4957,7 @@
                 <a:ea typeface="Georgia" pitchFamily="34" charset="-122"/>
                 <a:cs typeface="Georgia" pitchFamily="34" charset="-120"/>
               </a:rPr>
-              <a:t>and a named team running it on their behalf.</a:t>
+              <a:t>each house onboarded as its own isolated tenant, in minutes.</a:t>
             </a:r>
             <a:endParaRPr lang="en-US" sz="2400" dirty="0"/>
           </a:p>
@@ -4971,8 +4971,8 @@
         </p:nvSpPr>
         <p:spPr>
           <a:xfrm>
-            <a:off x="640080" y="2496312"/>
-            <a:ext cx="164592" cy="164592"/>
+            <a:off x="640080" y="2386584"/>
+            <a:ext cx="146304" cy="146304"/>
           </a:xfrm>
           <a:prstGeom prst="ellipse">
             <a:avLst/>
@@ -4991,8 +4991,8 @@
         </p:nvSpPr>
         <p:spPr>
           <a:xfrm>
-            <a:off x="914400" y="2377440"/>
-            <a:ext cx="7589520" cy="457200"/>
+            <a:off x="914400" y="2286000"/>
+            <a:ext cx="7589520" cy="402336"/>
           </a:xfrm>
           <a:prstGeom prst="rect">
             <a:avLst/>
@@ -5008,7 +5008,7 @@
               <a:buNone/>
             </a:pPr>
             <a:r>
-              <a:rPr lang="en-US" sz="1400" dirty="0">
+              <a:rPr lang="en-US" sz="1250" dirty="0">
                 <a:solidFill>
                   <a:srgbClr val="2D1B1A"/>
                 </a:solidFill>
@@ -5016,9 +5016,9 @@
                 <a:ea typeface="Calibri" pitchFamily="34" charset="-122"/>
                 <a:cs typeface="Calibri" pitchFamily="34" charset="-120"/>
               </a:rPr>
-              <a:t>24/7 listings + asynchronous bidding under the auction house's name.</a:t>
-            </a:r>
-            <a:endParaRPr lang="en-US" sz="1400" dirty="0"/>
+              <a:t>Self-serve onboarding wizard: /operators → admin approval → an RLS-isolated tenant in ~6 minutes, no SQL.</a:t>
+            </a:r>
+            <a:endParaRPr lang="en-US" sz="1250" dirty="0"/>
           </a:p>
         </p:txBody>
       </p:sp>
@@ -5030,8 +5030,8 @@
         </p:nvSpPr>
         <p:spPr>
           <a:xfrm>
-            <a:off x="640080" y="2953512"/>
-            <a:ext cx="164592" cy="164592"/>
+            <a:off x="640080" y="2788920"/>
+            <a:ext cx="146304" cy="146304"/>
           </a:xfrm>
           <a:prstGeom prst="ellipse">
             <a:avLst/>
@@ -5050,8 +5050,8 @@
         </p:nvSpPr>
         <p:spPr>
           <a:xfrm>
-            <a:off x="914400" y="2834640"/>
-            <a:ext cx="7589520" cy="457200"/>
+            <a:off x="914400" y="2688336"/>
+            <a:ext cx="7589520" cy="402336"/>
           </a:xfrm>
           <a:prstGeom prst="rect">
             <a:avLst/>
@@ -5067,7 +5067,7 @@
               <a:buNone/>
             </a:pPr>
             <a:r>
-              <a:rPr lang="en-US" sz="1400" dirty="0">
+              <a:rPr lang="en-US" sz="1250" dirty="0">
                 <a:solidFill>
                   <a:srgbClr val="2D1B1A"/>
                 </a:solidFill>
@@ -5075,9 +5075,9 @@
                 <a:ea typeface="Calibri" pitchFamily="34" charset="-122"/>
                 <a:cs typeface="Calibri" pitchFamily="34" charset="-120"/>
               </a:rPr>
-              <a:t>Paynow settlement, BillPay biller-inbound, EcoCash USSD, SMS notifications — every product in the ecosystem.</a:t>
-            </a:r>
-            <a:endParaRPr lang="en-US" sz="1400" dirty="0"/>
+              <a:t>Five live channels: web/PWA, WhatsApp, USSD, BillPay-as-biller, Facebook Messenger — buyers meet us where they already transact.</a:t>
+            </a:r>
+            <a:endParaRPr lang="en-US" sz="1250" dirty="0"/>
           </a:p>
         </p:txBody>
       </p:sp>
@@ -5089,8 +5089,8 @@
         </p:nvSpPr>
         <p:spPr>
           <a:xfrm>
-            <a:off x="640080" y="3410712"/>
-            <a:ext cx="164592" cy="164592"/>
+            <a:off x="640080" y="3191256"/>
+            <a:ext cx="146304" cy="146304"/>
           </a:xfrm>
           <a:prstGeom prst="ellipse">
             <a:avLst/>
@@ -5109,8 +5109,8 @@
         </p:nvSpPr>
         <p:spPr>
           <a:xfrm>
-            <a:off x="914400" y="3291840"/>
-            <a:ext cx="7589520" cy="457200"/>
+            <a:off x="914400" y="3090672"/>
+            <a:ext cx="7589520" cy="402336"/>
           </a:xfrm>
           <a:prstGeom prst="rect">
             <a:avLst/>
@@ -5126,7 +5126,7 @@
               <a:buNone/>
             </a:pPr>
             <a:r>
-              <a:rPr lang="en-US" sz="1400" dirty="0">
+              <a:rPr lang="en-US" sz="1250" dirty="0">
                 <a:solidFill>
                   <a:srgbClr val="2D1B1A"/>
                 </a:solidFill>
@@ -5134,9 +5134,9 @@
                 <a:ea typeface="Calibri" pitchFamily="34" charset="-122"/>
                 <a:cs typeface="Calibri" pitchFamily="34" charset="-120"/>
               </a:rPr>
-              <a:t>Bisafe escrow replaces the US$1,000 cash deposit. Remote bidders become real bidders.</a:t>
-            </a:r>
-            <a:endParaRPr lang="en-US" sz="1400" dirty="0"/>
+              <a:t>Paynow settlement, BillPay biller-inbound, EcoCash USSD, SMS notifications — every product in the ecosystem.</a:t>
+            </a:r>
+            <a:endParaRPr lang="en-US" sz="1250" dirty="0"/>
           </a:p>
         </p:txBody>
       </p:sp>
@@ -5148,8 +5148,8 @@
         </p:nvSpPr>
         <p:spPr>
           <a:xfrm>
-            <a:off x="640080" y="3867912"/>
-            <a:ext cx="164592" cy="164592"/>
+            <a:off x="640080" y="3593592"/>
+            <a:ext cx="146304" cy="146304"/>
           </a:xfrm>
           <a:prstGeom prst="ellipse">
             <a:avLst/>
@@ -5168,8 +5168,8 @@
         </p:nvSpPr>
         <p:spPr>
           <a:xfrm>
-            <a:off x="914400" y="3749040"/>
-            <a:ext cx="7589520" cy="457200"/>
+            <a:off x="914400" y="3493008"/>
+            <a:ext cx="7589520" cy="402336"/>
           </a:xfrm>
           <a:prstGeom prst="rect">
             <a:avLst/>
@@ -5185,7 +5185,7 @@
               <a:buNone/>
             </a:pPr>
             <a:r>
-              <a:rPr lang="en-US" sz="1400" dirty="0">
+              <a:rPr lang="en-US" sz="1250" dirty="0">
                 <a:solidFill>
                   <a:srgbClr val="2D1B1A"/>
                 </a:solidFill>
@@ -5193,9 +5193,9 @@
                 <a:ea typeface="Calibri" pitchFamily="34" charset="-122"/>
                 <a:cs typeface="Calibri" pitchFamily="34" charset="-120"/>
               </a:rPr>
-              <a:t>Constable workflow tool turns paper clearance into a chain-of-custody record.</a:t>
-            </a:r>
-            <a:endParaRPr lang="en-US" sz="1400" dirty="0"/>
+              <a:t>Bisafe escrow replaces the US$1,000 cash deposit. Remote bidders become real bidders.</a:t>
+            </a:r>
+            <a:endParaRPr lang="en-US" sz="1250" dirty="0"/>
           </a:p>
         </p:txBody>
       </p:sp>
@@ -5207,8 +5207,8 @@
         </p:nvSpPr>
         <p:spPr>
           <a:xfrm>
-            <a:off x="640080" y="4325112"/>
-            <a:ext cx="164592" cy="164592"/>
+            <a:off x="640080" y="3995928"/>
+            <a:ext cx="146304" cy="146304"/>
           </a:xfrm>
           <a:prstGeom prst="ellipse">
             <a:avLst/>
@@ -5227,8 +5227,8 @@
         </p:nvSpPr>
         <p:spPr>
           <a:xfrm>
-            <a:off x="914400" y="4206240"/>
-            <a:ext cx="7589520" cy="457200"/>
+            <a:off x="914400" y="3895344"/>
+            <a:ext cx="7589520" cy="402336"/>
           </a:xfrm>
           <a:prstGeom prst="rect">
             <a:avLst/>
@@ -5244,7 +5244,7 @@
               <a:buNone/>
             </a:pPr>
             <a:r>
-              <a:rPr lang="en-US" sz="1400" dirty="0">
+              <a:rPr lang="en-US" sz="1250" dirty="0">
                 <a:solidFill>
                   <a:srgbClr val="2D1B1A"/>
                 </a:solidFill>
@@ -5252,15 +5252,74 @@
                 <a:ea typeface="Calibri" pitchFamily="34" charset="-122"/>
                 <a:cs typeface="Calibri" pitchFamily="34" charset="-120"/>
               </a:rPr>
+              <a:t>Constable workflow tool turns paper clearance into a chain-of-custody record.</a:t>
+            </a:r>
+            <a:endParaRPr lang="en-US" sz="1250" dirty="0"/>
+          </a:p>
+        </p:txBody>
+      </p:sp>
+      <p:sp>
+        <p:nvSpPr>
+          <p:cNvPr id="16" name="Shape 14"/>
+          <p:cNvSpPr/>
+          <p:nvPr/>
+        </p:nvSpPr>
+        <p:spPr>
+          <a:xfrm>
+            <a:off x="640080" y="4398264"/>
+            <a:ext cx="146304" cy="146304"/>
+          </a:xfrm>
+          <a:prstGeom prst="ellipse">
+            <a:avLst/>
+          </a:prstGeom>
+          <a:solidFill>
+            <a:srgbClr val="D4A843"/>
+          </a:solidFill>
+          <a:ln/>
+        </p:spPr>
+      </p:sp>
+      <p:sp>
+        <p:nvSpPr>
+          <p:cNvPr id="17" name="Text 15"/>
+          <p:cNvSpPr/>
+          <p:nvPr/>
+        </p:nvSpPr>
+        <p:spPr>
+          <a:xfrm>
+            <a:off x="914400" y="4297680"/>
+            <a:ext cx="7589520" cy="402336"/>
+          </a:xfrm>
+          <a:prstGeom prst="rect">
+            <a:avLst/>
+          </a:prstGeom>
+          <a:noFill/>
+          <a:ln/>
+        </p:spPr>
+        <p:txBody>
+          <a:bodyPr wrap="square" lIns="0" tIns="0" rIns="0" bIns="0" rtlCol="0" anchor="t"/>
+          <a:lstStyle/>
+          <a:p>
+            <a:pPr indent="0" marL="0">
+              <a:buNone/>
+            </a:pPr>
+            <a:r>
+              <a:rPr lang="en-US" sz="1250" dirty="0">
+                <a:solidFill>
+                  <a:srgbClr val="2D1B1A"/>
+                </a:solidFill>
+                <a:latin typeface="Calibri" pitchFamily="34" charset="0"/>
+                <a:ea typeface="Calibri" pitchFamily="34" charset="-122"/>
+                <a:cs typeface="Calibri" pitchFamily="34" charset="-120"/>
+              </a:rPr>
               <a:t>Every buyer's phone number stays with the auction house — a remarketing list for next Saturday's sale.</a:t>
             </a:r>
-            <a:endParaRPr lang="en-US" sz="1400" dirty="0"/>
-          </a:p>
-        </p:txBody>
-      </p:sp>
-      <p:sp>
-        <p:nvSpPr>
-          <p:cNvPr id="16" name="Text 14"/>
+            <a:endParaRPr lang="en-US" sz="1250" dirty="0"/>
+          </a:p>
+        </p:txBody>
+      </p:sp>
+      <p:sp>
+        <p:nvSpPr>
+          <p:cNvPr id="18" name="Text 16"/>
           <p:cNvSpPr/>
           <p:nvPr/>
         </p:nvSpPr>
@@ -5299,7 +5358,7 @@
       </p:sp>
       <p:sp>
         <p:nvSpPr>
-          <p:cNvPr id="17" name="Text 15"/>
+          <p:cNvPr id="19" name="Text 17"/>
           <p:cNvSpPr/>
           <p:nvPr/>
         </p:nvSpPr>
@@ -5460,7 +5519,7 @@
                 <a:ea typeface="Georgia" pitchFamily="34" charset="-122"/>
                 <a:cs typeface="Georgia" pitchFamily="34" charset="-120"/>
               </a:rPr>
-              <a:t>We sell an engagement, not a licence.</a:t>
+              <a:t>We sell a subscription, not a licence.</a:t>
             </a:r>
             <a:endParaRPr lang="en-US" sz="3200" dirty="0"/>
           </a:p>
@@ -5499,7 +5558,7 @@
                 <a:ea typeface="Calibri" pitchFamily="34" charset="-122"/>
                 <a:cs typeface="Calibri" pitchFamily="34" charset="-120"/>
               </a:rPr>
-              <a:t>Three revenue lines, each tied to a different unit of value we deliver.</a:t>
+              <a:t>Four revenue lines: three B2B today, plus a consumer-transport line that grows the upside.</a:t>
             </a:r>
             <a:endParaRPr lang="en-US" sz="1300" dirty="0"/>
           </a:p>
@@ -5578,7 +5637,7 @@
                 <a:ea typeface="Calibri" pitchFamily="34" charset="-122"/>
                 <a:cs typeface="Calibri" pitchFamily="34" charset="-120"/>
               </a:rPr>
-              <a:t>ENGAGEMENT</a:t>
+              <a:t>ONBOARDING</a:t>
             </a:r>
             <a:endParaRPr lang="en-US" sz="1000" dirty="0"/>
           </a:p>
@@ -5617,7 +5676,7 @@
                 <a:ea typeface="Georgia" pitchFamily="34" charset="-122"/>
                 <a:cs typeface="Georgia" pitchFamily="34" charset="-120"/>
               </a:rPr>
-              <a:t>$5,000 – $12,000</a:t>
+              <a:t>$1,500 – $3,500</a:t>
             </a:r>
             <a:endParaRPr lang="en-US" sz="2600" dirty="0"/>
           </a:p>
@@ -5695,7 +5754,7 @@
                 <a:ea typeface="Calibri" pitchFamily="34" charset="-122"/>
                 <a:cs typeface="Calibri" pitchFamily="34" charset="-120"/>
               </a:rPr>
-              <a:t>Discovery, branded skin, data migration, Paynow integration, training day on the floor.</a:t>
+              <a:t>Tier A $3,500 · B $2,500 · C $1,500. Branded tenant, data migration, Paynow integration, training day. Pilot $1,000, credited on conversion.</a:t>
             </a:r>
             <a:endParaRPr lang="en-US" sz="1150" dirty="0"/>
           </a:p>
@@ -5774,7 +5833,7 @@
                 <a:ea typeface="Calibri" pitchFamily="34" charset="-122"/>
                 <a:cs typeface="Calibri" pitchFamily="34" charset="-120"/>
               </a:rPr>
-              <a:t>RETAINER</a:t>
+              <a:t>SUBSCRIPTION</a:t>
             </a:r>
             <a:endParaRPr lang="en-US" sz="1000" dirty="0"/>
           </a:p>
@@ -5813,7 +5872,7 @@
                 <a:ea typeface="Georgia" pitchFamily="34" charset="-122"/>
                 <a:cs typeface="Georgia" pitchFamily="34" charset="-120"/>
               </a:rPr>
-              <a:t>$1,200 – $2,500</a:t>
+              <a:t>$900 – $1,500</a:t>
             </a:r>
             <a:endParaRPr lang="en-US" sz="2600" dirty="0"/>
           </a:p>
@@ -5891,7 +5950,7 @@
                 <a:ea typeface="Calibri" pitchFamily="34" charset="-122"/>
                 <a:cs typeface="Calibri" pitchFamily="34" charset="-120"/>
               </a:rPr>
-              <a:t>We operate the platform on their behalf. Monitoring, support, reconciliation, monthly reports.</a:t>
+              <a:t>Tier A $1,500 · B $1,200 · C $900. Platform access, monitoring, support, reconciliation, monthly reports.</a:t>
             </a:r>
             <a:endParaRPr lang="en-US" sz="1150" dirty="0"/>
           </a:p>
@@ -5970,7 +6029,7 @@
                 <a:ea typeface="Calibri" pitchFamily="34" charset="-122"/>
                 <a:cs typeface="Calibri" pitchFamily="34" charset="-120"/>
               </a:rPr>
-              <a:t>TX SURCHARGE</a:t>
+              <a:t>TX TAKE</a:t>
             </a:r>
             <a:endParaRPr lang="en-US" sz="1000" dirty="0"/>
           </a:p>
@@ -6087,7 +6146,7 @@
                 <a:ea typeface="Calibri" pitchFamily="34" charset="-122"/>
                 <a:cs typeface="Calibri" pitchFamily="34" charset="-120"/>
               </a:rPr>
-              <a:t>Aligns long-term incentives. Smaller than a SaaS commission because the retainer carries the load.</a:t>
+              <a:t>On top of Paynow's fee. Aligns long-term incentives — the subscription carries the load. Transport adds a 4th, consumer line over time.</a:t>
             </a:r>
             <a:endParaRPr lang="en-US" sz="1150" dirty="0"/>
           </a:p>
@@ -6455,7 +6514,7 @@
                 <a:ea typeface="Calibri" pitchFamily="34" charset="-122"/>
                 <a:cs typeface="Calibri" pitchFamily="34" charset="-120"/>
               </a:rPr>
-              <a:t>Bought into EcoCash three years ago. Won't run his own SaaS.</a:t>
+              <a:t>Bought into EcoCash three years ago. Won't write a line of code.</a:t>
             </a:r>
             <a:endParaRPr lang="en-US" sz="1200" dirty="0"/>
           </a:p>
@@ -6603,7 +6662,7 @@
                 <a:ea typeface="Calibri" pitchFamily="34" charset="-122"/>
                 <a:cs typeface="Calibri" pitchFamily="34" charset="-120"/>
               </a:rPr>
-              <a:t>✓  A people-attached engagement, not a portal</a:t>
+              <a:t>✓  A branded tenant, onboarded in minutes — not a build</a:t>
             </a:r>
             <a:endParaRPr lang="en-US" sz="1200" dirty="0"/>
           </a:p>
@@ -6623,7 +6682,7 @@
                 <a:ea typeface="Calibri" pitchFamily="34" charset="-122"/>
                 <a:cs typeface="Calibri" pitchFamily="34" charset="-120"/>
               </a:rPr>
-              <a:t>✓  A retainer that pays our team to run it</a:t>
+              <a:t>✓  A subscription that keeps the platform running</a:t>
             </a:r>
             <a:endParaRPr lang="en-US" sz="1200" dirty="0"/>
           </a:p>
@@ -6643,7 +6702,7 @@
                 <a:ea typeface="Calibri" pitchFamily="34" charset="-122"/>
                 <a:cs typeface="Calibri" pitchFamily="34" charset="-120"/>
               </a:rPr>
-              <a:t>✓  A small tx surcharge — shared upside</a:t>
+              <a:t>✓  A small 0.75% take — shared upside</a:t>
             </a:r>
             <a:endParaRPr lang="en-US" sz="1200" dirty="0"/>
           </a:p>
@@ -7020,7 +7079,7 @@
                 <a:ea typeface="Calibri" pitchFamily="34" charset="-122"/>
                 <a:cs typeface="Calibri" pitchFamily="34" charset="-120"/>
               </a:rPr>
-              <a:t>RUN-IT-FOR-YOU →</a:t>
+              <a:t>SETTLEMENT BUILT IN →</a:t>
             </a:r>
             <a:endParaRPr lang="en-US" sz="1000" dirty="0"/>
           </a:p>
@@ -7423,7 +7482,7 @@
                 <a:ea typeface="Calibri" pitchFamily="34" charset="-122"/>
                 <a:cs typeface="Calibri" pitchFamily="34" charset="-120"/>
               </a:rPr>
-              <a:t>UNIT ECONOMICS</a:t>
+              <a:t>THE NUMBERS</a:t>
             </a:r>
             <a:endParaRPr lang="en-US" sz="1100" dirty="0"/>
           </a:p>
@@ -7462,7 +7521,7 @@
                 <a:ea typeface="Georgia" pitchFamily="34" charset="-122"/>
                 <a:cs typeface="Georgia" pitchFamily="34" charset="-120"/>
               </a:rPr>
-              <a:t>~$35,000 per house, recurring, by year 2.</a:t>
+              <a:t>$1.03M revenue over five years, off ~20 houses.</a:t>
             </a:r>
             <a:endParaRPr lang="en-US" sz="3200" dirty="0"/>
           </a:p>
@@ -7501,7 +7560,7 @@
                 <a:ea typeface="Calibri" pitchFamily="34" charset="-122"/>
                 <a:cs typeface="Calibri" pitchFamily="34" charset="-120"/>
               </a:rPr>
-              <a:t>Illustrative numbers for a mid-tier auction house at 70% platform penetration. The model is high-revenue / low-volume — fewer customers, deeper relationships.</a:t>
+              <a:t>The 5-year model: 5 → 8 → 12 → 16 → 20 live houses (about a third of the ~40–60 house market). Subscription is the spine; transaction take and transport ride on top. All US$.</a:t>
             </a:r>
             <a:endParaRPr lang="en-US" sz="1300" dirty="0"/>
           </a:p>
@@ -7515,8 +7574,8 @@
         </p:nvSpPr>
         <p:spPr>
           <a:xfrm>
-            <a:off x="640080" y="2423160"/>
-            <a:ext cx="1280160" cy="566928"/>
+            <a:off x="640080" y="2240280"/>
+            <a:ext cx="1645920" cy="301752"/>
           </a:xfrm>
           <a:prstGeom prst="rect">
             <a:avLst/>
@@ -7543,8 +7602,8 @@
         </p:nvSpPr>
         <p:spPr>
           <a:xfrm>
-            <a:off x="1920240" y="2423160"/>
-            <a:ext cx="1554480" cy="566928"/>
+            <a:off x="2286000" y="2240280"/>
+            <a:ext cx="1554480" cy="301752"/>
           </a:xfrm>
           <a:prstGeom prst="rect">
             <a:avLst/>
@@ -7568,7 +7627,7 @@
                 <a:ea typeface="Calibri" pitchFamily="34" charset="-122"/>
                 <a:cs typeface="Calibri" pitchFamily="34" charset="-120"/>
               </a:rPr>
-              <a:t>Engagement</a:t>
+              <a:t>Year 1</a:t>
             </a:r>
             <a:endParaRPr lang="en-US" sz="1100" dirty="0"/>
           </a:p>
@@ -7582,8 +7641,8 @@
         </p:nvSpPr>
         <p:spPr>
           <a:xfrm>
-            <a:off x="3474720" y="2423160"/>
-            <a:ext cx="1737360" cy="566928"/>
+            <a:off x="3840480" y="2240280"/>
+            <a:ext cx="1554480" cy="301752"/>
           </a:xfrm>
           <a:prstGeom prst="rect">
             <a:avLst/>
@@ -7607,7 +7666,7 @@
                 <a:ea typeface="Calibri" pitchFamily="34" charset="-122"/>
                 <a:cs typeface="Calibri" pitchFamily="34" charset="-120"/>
               </a:rPr>
-              <a:t>Retainer (×12)</a:t>
+              <a:t>Year 3</a:t>
             </a:r>
             <a:endParaRPr lang="en-US" sz="1100" dirty="0"/>
           </a:p>
@@ -7621,8 +7680,8 @@
         </p:nvSpPr>
         <p:spPr>
           <a:xfrm>
-            <a:off x="5212080" y="2423160"/>
-            <a:ext cx="1737360" cy="566928"/>
+            <a:off x="5394960" y="2240280"/>
+            <a:ext cx="1554480" cy="301752"/>
           </a:xfrm>
           <a:prstGeom prst="rect">
             <a:avLst/>
@@ -7646,7 +7705,7 @@
                 <a:ea typeface="Calibri" pitchFamily="34" charset="-122"/>
                 <a:cs typeface="Calibri" pitchFamily="34" charset="-120"/>
               </a:rPr>
-              <a:t>Tx surcharge</a:t>
+              <a:t>Year 5</a:t>
             </a:r>
             <a:endParaRPr lang="en-US" sz="1100" dirty="0"/>
           </a:p>
@@ -7660,8 +7719,8 @@
         </p:nvSpPr>
         <p:spPr>
           <a:xfrm>
-            <a:off x="6949440" y="2423160"/>
-            <a:ext cx="1554480" cy="566928"/>
+            <a:off x="6949440" y="2240280"/>
+            <a:ext cx="1554480" cy="301752"/>
           </a:xfrm>
           <a:prstGeom prst="rect">
             <a:avLst/>
@@ -7685,7 +7744,7 @@
                 <a:ea typeface="Calibri" pitchFamily="34" charset="-122"/>
                 <a:cs typeface="Calibri" pitchFamily="34" charset="-120"/>
               </a:rPr>
-              <a:t>Total / yr</a:t>
+              <a:t>5-yr total</a:t>
             </a:r>
             <a:endParaRPr lang="en-US" sz="1100" dirty="0"/>
           </a:p>
@@ -7699,7 +7758,7 @@
         </p:nvSpPr>
         <p:spPr>
           <a:xfrm>
-            <a:off x="640080" y="2990088"/>
+            <a:off x="640080" y="2542032"/>
             <a:ext cx="7863840" cy="0"/>
           </a:xfrm>
           <a:prstGeom prst="line">
@@ -7722,8 +7781,8 @@
         </p:nvSpPr>
         <p:spPr>
           <a:xfrm>
-            <a:off x="640080" y="3127248"/>
-            <a:ext cx="1280160" cy="566928"/>
+            <a:off x="640080" y="2633472"/>
+            <a:ext cx="1645920" cy="301752"/>
           </a:xfrm>
           <a:prstGeom prst="rect">
             <a:avLst/>
@@ -7747,7 +7806,7 @@
                 <a:ea typeface="Calibri" pitchFamily="34" charset="-122"/>
                 <a:cs typeface="Calibri" pitchFamily="34" charset="-120"/>
               </a:rPr>
-              <a:t>YEAR 1</a:t>
+              <a:t>Houses live</a:t>
             </a:r>
             <a:endParaRPr lang="en-US" sz="1200" dirty="0"/>
           </a:p>
@@ -7761,8 +7820,8 @@
         </p:nvSpPr>
         <p:spPr>
           <a:xfrm>
-            <a:off x="1920240" y="3127248"/>
-            <a:ext cx="1554480" cy="566928"/>
+            <a:off x="2286000" y="2633472"/>
+            <a:ext cx="1554480" cy="301752"/>
           </a:xfrm>
           <a:prstGeom prst="rect">
             <a:avLst/>
@@ -7778,7 +7837,7 @@
               <a:buNone/>
             </a:pPr>
             <a:r>
-              <a:rPr lang="en-US" sz="1800" dirty="0">
+              <a:rPr lang="en-US" sz="1400" dirty="0">
                 <a:solidFill>
                   <a:srgbClr val="2D1B1A"/>
                 </a:solidFill>
@@ -7786,9 +7845,9 @@
                 <a:ea typeface="Georgia" pitchFamily="34" charset="-122"/>
                 <a:cs typeface="Georgia" pitchFamily="34" charset="-120"/>
               </a:rPr>
-              <a:t>$8,000</a:t>
-            </a:r>
-            <a:endParaRPr lang="en-US" sz="1800" dirty="0"/>
+              <a:t>5</a:t>
+            </a:r>
+            <a:endParaRPr lang="en-US" sz="1400" dirty="0"/>
           </a:p>
         </p:txBody>
       </p:sp>
@@ -7800,8 +7859,8 @@
         </p:nvSpPr>
         <p:spPr>
           <a:xfrm>
-            <a:off x="3474720" y="3127248"/>
-            <a:ext cx="1737360" cy="566928"/>
+            <a:off x="3840480" y="2633472"/>
+            <a:ext cx="1554480" cy="301752"/>
           </a:xfrm>
           <a:prstGeom prst="rect">
             <a:avLst/>
@@ -7817,7 +7876,7 @@
               <a:buNone/>
             </a:pPr>
             <a:r>
-              <a:rPr lang="en-US" sz="1800" dirty="0">
+              <a:rPr lang="en-US" sz="1400" dirty="0">
                 <a:solidFill>
                   <a:srgbClr val="2D1B1A"/>
                 </a:solidFill>
@@ -7825,9 +7884,9 @@
                 <a:ea typeface="Georgia" pitchFamily="34" charset="-122"/>
                 <a:cs typeface="Georgia" pitchFamily="34" charset="-120"/>
               </a:rPr>
-              <a:t>$18,000</a:t>
-            </a:r>
-            <a:endParaRPr lang="en-US" sz="1800" dirty="0"/>
+              <a:t>12</a:t>
+            </a:r>
+            <a:endParaRPr lang="en-US" sz="1400" dirty="0"/>
           </a:p>
         </p:txBody>
       </p:sp>
@@ -7839,8 +7898,8 @@
         </p:nvSpPr>
         <p:spPr>
           <a:xfrm>
-            <a:off x="5212080" y="3127248"/>
-            <a:ext cx="1737360" cy="566928"/>
+            <a:off x="5394960" y="2633472"/>
+            <a:ext cx="1554480" cy="301752"/>
           </a:xfrm>
           <a:prstGeom prst="rect">
             <a:avLst/>
@@ -7856,7 +7915,7 @@
               <a:buNone/>
             </a:pPr>
             <a:r>
-              <a:rPr lang="en-US" sz="1800" dirty="0">
+              <a:rPr lang="en-US" sz="1400" dirty="0">
                 <a:solidFill>
                   <a:srgbClr val="2D1B1A"/>
                 </a:solidFill>
@@ -7864,9 +7923,9 @@
                 <a:ea typeface="Georgia" pitchFamily="34" charset="-122"/>
                 <a:cs typeface="Georgia" pitchFamily="34" charset="-120"/>
               </a:rPr>
-              <a:t>$4,800</a:t>
-            </a:r>
-            <a:endParaRPr lang="en-US" sz="1800" dirty="0"/>
+              <a:t>20</a:t>
+            </a:r>
+            <a:endParaRPr lang="en-US" sz="1400" dirty="0"/>
           </a:p>
         </p:txBody>
       </p:sp>
@@ -7878,8 +7937,8 @@
         </p:nvSpPr>
         <p:spPr>
           <a:xfrm>
-            <a:off x="6949440" y="3127248"/>
-            <a:ext cx="1554480" cy="566928"/>
+            <a:off x="6949440" y="2633472"/>
+            <a:ext cx="1554480" cy="301752"/>
           </a:xfrm>
           <a:prstGeom prst="rect">
             <a:avLst/>
@@ -7895,7 +7954,7 @@
               <a:buNone/>
             </a:pPr>
             <a:r>
-              <a:rPr lang="en-US" sz="1800" b="1" dirty="0">
+              <a:rPr lang="en-US" sz="1400" b="1" dirty="0">
                 <a:solidFill>
                   <a:srgbClr val="B85042"/>
                 </a:solidFill>
@@ -7903,9 +7962,9 @@
                 <a:ea typeface="Georgia" pitchFamily="34" charset="-122"/>
                 <a:cs typeface="Georgia" pitchFamily="34" charset="-120"/>
               </a:rPr>
-              <a:t>$30,800</a:t>
-            </a:r>
-            <a:endParaRPr lang="en-US" sz="1800" dirty="0"/>
+              <a:t>20</a:t>
+            </a:r>
+            <a:endParaRPr lang="en-US" sz="1400" dirty="0"/>
           </a:p>
         </p:txBody>
       </p:sp>
@@ -7917,8 +7976,8 @@
         </p:nvSpPr>
         <p:spPr>
           <a:xfrm>
-            <a:off x="640080" y="3785616"/>
-            <a:ext cx="1280160" cy="566928"/>
+            <a:off x="640080" y="2935224"/>
+            <a:ext cx="1645920" cy="301752"/>
           </a:xfrm>
           <a:prstGeom prst="rect">
             <a:avLst/>
@@ -7942,7 +8001,7 @@
                 <a:ea typeface="Calibri" pitchFamily="34" charset="-122"/>
                 <a:cs typeface="Calibri" pitchFamily="34" charset="-120"/>
               </a:rPr>
-              <a:t>YEAR 2</a:t>
+              <a:t>Onboarding</a:t>
             </a:r>
             <a:endParaRPr lang="en-US" sz="1200" dirty="0"/>
           </a:p>
@@ -7956,8 +8015,8 @@
         </p:nvSpPr>
         <p:spPr>
           <a:xfrm>
-            <a:off x="1920240" y="3785616"/>
-            <a:ext cx="1554480" cy="566928"/>
+            <a:off x="2286000" y="2935224"/>
+            <a:ext cx="1554480" cy="301752"/>
           </a:xfrm>
           <a:prstGeom prst="rect">
             <a:avLst/>
@@ -7973,7 +8032,7 @@
               <a:buNone/>
             </a:pPr>
             <a:r>
-              <a:rPr lang="en-US" sz="1800" dirty="0">
+              <a:rPr lang="en-US" sz="1400" dirty="0">
                 <a:solidFill>
                   <a:srgbClr val="2D1B1A"/>
                 </a:solidFill>
@@ -7981,9 +8040,9 @@
                 <a:ea typeface="Georgia" pitchFamily="34" charset="-122"/>
                 <a:cs typeface="Georgia" pitchFamily="34" charset="-120"/>
               </a:rPr>
-              <a:t>—</a:t>
-            </a:r>
-            <a:endParaRPr lang="en-US" sz="1800" dirty="0"/>
+              <a:t>$14,500</a:t>
+            </a:r>
+            <a:endParaRPr lang="en-US" sz="1400" dirty="0"/>
           </a:p>
         </p:txBody>
       </p:sp>
@@ -7995,8 +8054,8 @@
         </p:nvSpPr>
         <p:spPr>
           <a:xfrm>
-            <a:off x="3474720" y="3785616"/>
-            <a:ext cx="1737360" cy="566928"/>
+            <a:off x="3840480" y="2935224"/>
+            <a:ext cx="1554480" cy="301752"/>
           </a:xfrm>
           <a:prstGeom prst="rect">
             <a:avLst/>
@@ -8012,7 +8071,7 @@
               <a:buNone/>
             </a:pPr>
             <a:r>
-              <a:rPr lang="en-US" sz="1800" dirty="0">
+              <a:rPr lang="en-US" sz="1400" dirty="0">
                 <a:solidFill>
                   <a:srgbClr val="2D1B1A"/>
                 </a:solidFill>
@@ -8020,9 +8079,9 @@
                 <a:ea typeface="Georgia" pitchFamily="34" charset="-122"/>
                 <a:cs typeface="Georgia" pitchFamily="34" charset="-120"/>
               </a:rPr>
-              <a:t>$24,000</a:t>
-            </a:r>
-            <a:endParaRPr lang="en-US" sz="1800" dirty="0"/>
+              <a:t>$10,000</a:t>
+            </a:r>
+            <a:endParaRPr lang="en-US" sz="1400" dirty="0"/>
           </a:p>
         </p:txBody>
       </p:sp>
@@ -8034,8 +8093,8 @@
         </p:nvSpPr>
         <p:spPr>
           <a:xfrm>
-            <a:off x="5212080" y="3785616"/>
-            <a:ext cx="1737360" cy="566928"/>
+            <a:off x="5394960" y="2935224"/>
+            <a:ext cx="1554480" cy="301752"/>
           </a:xfrm>
           <a:prstGeom prst="rect">
             <a:avLst/>
@@ -8051,7 +8110,7 @@
               <a:buNone/>
             </a:pPr>
             <a:r>
-              <a:rPr lang="en-US" sz="1800" dirty="0">
+              <a:rPr lang="en-US" sz="1400" dirty="0">
                 <a:solidFill>
                   <a:srgbClr val="2D1B1A"/>
                 </a:solidFill>
@@ -8059,9 +8118,9 @@
                 <a:ea typeface="Georgia" pitchFamily="34" charset="-122"/>
                 <a:cs typeface="Georgia" pitchFamily="34" charset="-120"/>
               </a:rPr>
-              <a:t>$11,200</a:t>
-            </a:r>
-            <a:endParaRPr lang="en-US" sz="1800" dirty="0"/>
+              <a:t>$10,000</a:t>
+            </a:r>
+            <a:endParaRPr lang="en-US" sz="1400" dirty="0"/>
           </a:p>
         </p:txBody>
       </p:sp>
@@ -8073,8 +8132,8 @@
         </p:nvSpPr>
         <p:spPr>
           <a:xfrm>
-            <a:off x="6949440" y="3785616"/>
-            <a:ext cx="1554480" cy="566928"/>
+            <a:off x="6949440" y="2935224"/>
+            <a:ext cx="1554480" cy="301752"/>
           </a:xfrm>
           <a:prstGeom prst="rect">
             <a:avLst/>
@@ -8090,7 +8149,7 @@
               <a:buNone/>
             </a:pPr>
             <a:r>
-              <a:rPr lang="en-US" sz="1800" b="1" dirty="0">
+              <a:rPr lang="en-US" sz="1400" b="1" dirty="0">
                 <a:solidFill>
                   <a:srgbClr val="B85042"/>
                 </a:solidFill>
@@ -8098,9 +8157,9 @@
                 <a:ea typeface="Georgia" pitchFamily="34" charset="-122"/>
                 <a:cs typeface="Georgia" pitchFamily="34" charset="-120"/>
               </a:rPr>
-              <a:t>$35,200</a:t>
-            </a:r>
-            <a:endParaRPr lang="en-US" sz="1800" dirty="0"/>
+              <a:t>$52,000</a:t>
+            </a:r>
+            <a:endParaRPr lang="en-US" sz="1400" dirty="0"/>
           </a:p>
         </p:txBody>
       </p:sp>
@@ -8112,7 +8171,810 @@
         </p:nvSpPr>
         <p:spPr>
           <a:xfrm>
-            <a:off x="640080" y="4434840"/>
+            <a:off x="640080" y="3236976"/>
+            <a:ext cx="1645920" cy="301752"/>
+          </a:xfrm>
+          <a:prstGeom prst="rect">
+            <a:avLst/>
+          </a:prstGeom>
+          <a:noFill/>
+          <a:ln/>
+        </p:spPr>
+        <p:txBody>
+          <a:bodyPr wrap="square" lIns="0" tIns="0" rIns="0" bIns="0" rtlCol="0" anchor="ctr"/>
+          <a:lstStyle/>
+          <a:p>
+            <a:pPr algn="l" indent="0" marL="0">
+              <a:buNone/>
+            </a:pPr>
+            <a:r>
+              <a:rPr lang="en-US" sz="1200" b="1" dirty="0">
+                <a:solidFill>
+                  <a:srgbClr val="2D1B1A"/>
+                </a:solidFill>
+                <a:latin typeface="Calibri" pitchFamily="34" charset="0"/>
+                <a:ea typeface="Calibri" pitchFamily="34" charset="-122"/>
+                <a:cs typeface="Calibri" pitchFamily="34" charset="-120"/>
+              </a:rPr>
+              <a:t>Subscription</a:t>
+            </a:r>
+            <a:endParaRPr lang="en-US" sz="1200" dirty="0"/>
+          </a:p>
+        </p:txBody>
+      </p:sp>
+      <p:sp>
+        <p:nvSpPr>
+          <p:cNvPr id="23" name="Text 21"/>
+          <p:cNvSpPr/>
+          <p:nvPr/>
+        </p:nvSpPr>
+        <p:spPr>
+          <a:xfrm>
+            <a:off x="2286000" y="3236976"/>
+            <a:ext cx="1554480" cy="301752"/>
+          </a:xfrm>
+          <a:prstGeom prst="rect">
+            <a:avLst/>
+          </a:prstGeom>
+          <a:noFill/>
+          <a:ln/>
+        </p:spPr>
+        <p:txBody>
+          <a:bodyPr wrap="square" lIns="0" tIns="0" rIns="0" bIns="0" rtlCol="0" anchor="ctr"/>
+          <a:lstStyle/>
+          <a:p>
+            <a:pPr algn="r" indent="0" marL="0">
+              <a:buNone/>
+            </a:pPr>
+            <a:r>
+              <a:rPr lang="en-US" sz="1400" dirty="0">
+                <a:solidFill>
+                  <a:srgbClr val="2D1B1A"/>
+                </a:solidFill>
+                <a:latin typeface="Georgia" pitchFamily="34" charset="0"/>
+                <a:ea typeface="Georgia" pitchFamily="34" charset="-122"/>
+                <a:cs typeface="Georgia" pitchFamily="34" charset="-120"/>
+              </a:rPr>
+              <a:t>$39,600</a:t>
+            </a:r>
+            <a:endParaRPr lang="en-US" sz="1400" dirty="0"/>
+          </a:p>
+        </p:txBody>
+      </p:sp>
+      <p:sp>
+        <p:nvSpPr>
+          <p:cNvPr id="24" name="Text 22"/>
+          <p:cNvSpPr/>
+          <p:nvPr/>
+        </p:nvSpPr>
+        <p:spPr>
+          <a:xfrm>
+            <a:off x="3840480" y="3236976"/>
+            <a:ext cx="1554480" cy="301752"/>
+          </a:xfrm>
+          <a:prstGeom prst="rect">
+            <a:avLst/>
+          </a:prstGeom>
+          <a:noFill/>
+          <a:ln/>
+        </p:spPr>
+        <p:txBody>
+          <a:bodyPr wrap="square" lIns="0" tIns="0" rIns="0" bIns="0" rtlCol="0" anchor="ctr"/>
+          <a:lstStyle/>
+          <a:p>
+            <a:pPr algn="r" indent="0" marL="0">
+              <a:buNone/>
+            </a:pPr>
+            <a:r>
+              <a:rPr lang="en-US" sz="1400" dirty="0">
+                <a:solidFill>
+                  <a:srgbClr val="2D1B1A"/>
+                </a:solidFill>
+                <a:latin typeface="Georgia" pitchFamily="34" charset="0"/>
+                <a:ea typeface="Georgia" pitchFamily="34" charset="-122"/>
+                <a:cs typeface="Georgia" pitchFamily="34" charset="-120"/>
+              </a:rPr>
+              <a:t>$151,200</a:t>
+            </a:r>
+            <a:endParaRPr lang="en-US" sz="1400" dirty="0"/>
+          </a:p>
+        </p:txBody>
+      </p:sp>
+      <p:sp>
+        <p:nvSpPr>
+          <p:cNvPr id="25" name="Text 23"/>
+          <p:cNvSpPr/>
+          <p:nvPr/>
+        </p:nvSpPr>
+        <p:spPr>
+          <a:xfrm>
+            <a:off x="5394960" y="3236976"/>
+            <a:ext cx="1554480" cy="301752"/>
+          </a:xfrm>
+          <a:prstGeom prst="rect">
+            <a:avLst/>
+          </a:prstGeom>
+          <a:noFill/>
+          <a:ln/>
+        </p:spPr>
+        <p:txBody>
+          <a:bodyPr wrap="square" lIns="0" tIns="0" rIns="0" bIns="0" rtlCol="0" anchor="ctr"/>
+          <a:lstStyle/>
+          <a:p>
+            <a:pPr algn="r" indent="0" marL="0">
+              <a:buNone/>
+            </a:pPr>
+            <a:r>
+              <a:rPr lang="en-US" sz="1400" dirty="0">
+                <a:solidFill>
+                  <a:srgbClr val="2D1B1A"/>
+                </a:solidFill>
+                <a:latin typeface="Georgia" pitchFamily="34" charset="0"/>
+                <a:ea typeface="Georgia" pitchFamily="34" charset="-122"/>
+                <a:cs typeface="Georgia" pitchFamily="34" charset="-120"/>
+              </a:rPr>
+              <a:t>$266,400</a:t>
+            </a:r>
+            <a:endParaRPr lang="en-US" sz="1400" dirty="0"/>
+          </a:p>
+        </p:txBody>
+      </p:sp>
+      <p:sp>
+        <p:nvSpPr>
+          <p:cNvPr id="26" name="Text 24"/>
+          <p:cNvSpPr/>
+          <p:nvPr/>
+        </p:nvSpPr>
+        <p:spPr>
+          <a:xfrm>
+            <a:off x="6949440" y="3236976"/>
+            <a:ext cx="1554480" cy="301752"/>
+          </a:xfrm>
+          <a:prstGeom prst="rect">
+            <a:avLst/>
+          </a:prstGeom>
+          <a:noFill/>
+          <a:ln/>
+        </p:spPr>
+        <p:txBody>
+          <a:bodyPr wrap="square" lIns="0" tIns="0" rIns="0" bIns="0" rtlCol="0" anchor="ctr"/>
+          <a:lstStyle/>
+          <a:p>
+            <a:pPr algn="r" indent="0" marL="0">
+              <a:buNone/>
+            </a:pPr>
+            <a:r>
+              <a:rPr lang="en-US" sz="1400" b="1" dirty="0">
+                <a:solidFill>
+                  <a:srgbClr val="B85042"/>
+                </a:solidFill>
+                <a:latin typeface="Georgia" pitchFamily="34" charset="0"/>
+                <a:ea typeface="Georgia" pitchFamily="34" charset="-122"/>
+                <a:cs typeface="Georgia" pitchFamily="34" charset="-120"/>
+              </a:rPr>
+              <a:t>$766,800</a:t>
+            </a:r>
+            <a:endParaRPr lang="en-US" sz="1400" dirty="0"/>
+          </a:p>
+        </p:txBody>
+      </p:sp>
+      <p:sp>
+        <p:nvSpPr>
+          <p:cNvPr id="27" name="Text 25"/>
+          <p:cNvSpPr/>
+          <p:nvPr/>
+        </p:nvSpPr>
+        <p:spPr>
+          <a:xfrm>
+            <a:off x="640080" y="3538728"/>
+            <a:ext cx="1645920" cy="301752"/>
+          </a:xfrm>
+          <a:prstGeom prst="rect">
+            <a:avLst/>
+          </a:prstGeom>
+          <a:noFill/>
+          <a:ln/>
+        </p:spPr>
+        <p:txBody>
+          <a:bodyPr wrap="square" lIns="0" tIns="0" rIns="0" bIns="0" rtlCol="0" anchor="ctr"/>
+          <a:lstStyle/>
+          <a:p>
+            <a:pPr algn="l" indent="0" marL="0">
+              <a:buNone/>
+            </a:pPr>
+            <a:r>
+              <a:rPr lang="en-US" sz="1200" b="1" dirty="0">
+                <a:solidFill>
+                  <a:srgbClr val="2D1B1A"/>
+                </a:solidFill>
+                <a:latin typeface="Calibri" pitchFamily="34" charset="0"/>
+                <a:ea typeface="Calibri" pitchFamily="34" charset="-122"/>
+                <a:cs typeface="Calibri" pitchFamily="34" charset="-120"/>
+              </a:rPr>
+              <a:t>Tx take</a:t>
+            </a:r>
+            <a:endParaRPr lang="en-US" sz="1200" dirty="0"/>
+          </a:p>
+        </p:txBody>
+      </p:sp>
+      <p:sp>
+        <p:nvSpPr>
+          <p:cNvPr id="28" name="Text 26"/>
+          <p:cNvSpPr/>
+          <p:nvPr/>
+        </p:nvSpPr>
+        <p:spPr>
+          <a:xfrm>
+            <a:off x="2286000" y="3538728"/>
+            <a:ext cx="1554480" cy="301752"/>
+          </a:xfrm>
+          <a:prstGeom prst="rect">
+            <a:avLst/>
+          </a:prstGeom>
+          <a:noFill/>
+          <a:ln/>
+        </p:spPr>
+        <p:txBody>
+          <a:bodyPr wrap="square" lIns="0" tIns="0" rIns="0" bIns="0" rtlCol="0" anchor="ctr"/>
+          <a:lstStyle/>
+          <a:p>
+            <a:pPr algn="r" indent="0" marL="0">
+              <a:buNone/>
+            </a:pPr>
+            <a:r>
+              <a:rPr lang="en-US" sz="1400" dirty="0">
+                <a:solidFill>
+                  <a:srgbClr val="2D1B1A"/>
+                </a:solidFill>
+                <a:latin typeface="Georgia" pitchFamily="34" charset="0"/>
+                <a:ea typeface="Georgia" pitchFamily="34" charset="-122"/>
+                <a:cs typeface="Georgia" pitchFamily="34" charset="-120"/>
+              </a:rPr>
+              <a:t>$6,710</a:t>
+            </a:r>
+            <a:endParaRPr lang="en-US" sz="1400" dirty="0"/>
+          </a:p>
+        </p:txBody>
+      </p:sp>
+      <p:sp>
+        <p:nvSpPr>
+          <p:cNvPr id="29" name="Text 27"/>
+          <p:cNvSpPr/>
+          <p:nvPr/>
+        </p:nvSpPr>
+        <p:spPr>
+          <a:xfrm>
+            <a:off x="3840480" y="3538728"/>
+            <a:ext cx="1554480" cy="301752"/>
+          </a:xfrm>
+          <a:prstGeom prst="rect">
+            <a:avLst/>
+          </a:prstGeom>
+          <a:noFill/>
+          <a:ln/>
+        </p:spPr>
+        <p:txBody>
+          <a:bodyPr wrap="square" lIns="0" tIns="0" rIns="0" bIns="0" rtlCol="0" anchor="ctr"/>
+          <a:lstStyle/>
+          <a:p>
+            <a:pPr algn="r" indent="0" marL="0">
+              <a:buNone/>
+            </a:pPr>
+            <a:r>
+              <a:rPr lang="en-US" sz="1400" dirty="0">
+                <a:solidFill>
+                  <a:srgbClr val="2D1B1A"/>
+                </a:solidFill>
+                <a:latin typeface="Georgia" pitchFamily="34" charset="0"/>
+                <a:ea typeface="Georgia" pitchFamily="34" charset="-122"/>
+                <a:cs typeface="Georgia" pitchFamily="34" charset="-120"/>
+              </a:rPr>
+              <a:t>$27,625</a:t>
+            </a:r>
+            <a:endParaRPr lang="en-US" sz="1400" dirty="0"/>
+          </a:p>
+        </p:txBody>
+      </p:sp>
+      <p:sp>
+        <p:nvSpPr>
+          <p:cNvPr id="30" name="Text 28"/>
+          <p:cNvSpPr/>
+          <p:nvPr/>
+        </p:nvSpPr>
+        <p:spPr>
+          <a:xfrm>
+            <a:off x="5394960" y="3538728"/>
+            <a:ext cx="1554480" cy="301752"/>
+          </a:xfrm>
+          <a:prstGeom prst="rect">
+            <a:avLst/>
+          </a:prstGeom>
+          <a:noFill/>
+          <a:ln/>
+        </p:spPr>
+        <p:txBody>
+          <a:bodyPr wrap="square" lIns="0" tIns="0" rIns="0" bIns="0" rtlCol="0" anchor="ctr"/>
+          <a:lstStyle/>
+          <a:p>
+            <a:pPr algn="r" indent="0" marL="0">
+              <a:buNone/>
+            </a:pPr>
+            <a:r>
+              <a:rPr lang="en-US" sz="1400" dirty="0">
+                <a:solidFill>
+                  <a:srgbClr val="2D1B1A"/>
+                </a:solidFill>
+                <a:latin typeface="Georgia" pitchFamily="34" charset="0"/>
+                <a:ea typeface="Georgia" pitchFamily="34" charset="-122"/>
+                <a:cs typeface="Georgia" pitchFamily="34" charset="-120"/>
+              </a:rPr>
+              <a:t>$53,618</a:t>
+            </a:r>
+            <a:endParaRPr lang="en-US" sz="1400" dirty="0"/>
+          </a:p>
+        </p:txBody>
+      </p:sp>
+      <p:sp>
+        <p:nvSpPr>
+          <p:cNvPr id="31" name="Text 29"/>
+          <p:cNvSpPr/>
+          <p:nvPr/>
+        </p:nvSpPr>
+        <p:spPr>
+          <a:xfrm>
+            <a:off x="6949440" y="3538728"/>
+            <a:ext cx="1554480" cy="301752"/>
+          </a:xfrm>
+          <a:prstGeom prst="rect">
+            <a:avLst/>
+          </a:prstGeom>
+          <a:noFill/>
+          <a:ln/>
+        </p:spPr>
+        <p:txBody>
+          <a:bodyPr wrap="square" lIns="0" tIns="0" rIns="0" bIns="0" rtlCol="0" anchor="ctr"/>
+          <a:lstStyle/>
+          <a:p>
+            <a:pPr algn="r" indent="0" marL="0">
+              <a:buNone/>
+            </a:pPr>
+            <a:r>
+              <a:rPr lang="en-US" sz="1400" b="1" dirty="0">
+                <a:solidFill>
+                  <a:srgbClr val="B85042"/>
+                </a:solidFill>
+                <a:latin typeface="Georgia" pitchFamily="34" charset="0"/>
+                <a:ea typeface="Georgia" pitchFamily="34" charset="-122"/>
+                <a:cs typeface="Georgia" pitchFamily="34" charset="-120"/>
+              </a:rPr>
+              <a:t>$146,258</a:t>
+            </a:r>
+            <a:endParaRPr lang="en-US" sz="1400" dirty="0"/>
+          </a:p>
+        </p:txBody>
+      </p:sp>
+      <p:sp>
+        <p:nvSpPr>
+          <p:cNvPr id="32" name="Text 30"/>
+          <p:cNvSpPr/>
+          <p:nvPr/>
+        </p:nvSpPr>
+        <p:spPr>
+          <a:xfrm>
+            <a:off x="640080" y="3840480"/>
+            <a:ext cx="1645920" cy="301752"/>
+          </a:xfrm>
+          <a:prstGeom prst="rect">
+            <a:avLst/>
+          </a:prstGeom>
+          <a:noFill/>
+          <a:ln/>
+        </p:spPr>
+        <p:txBody>
+          <a:bodyPr wrap="square" lIns="0" tIns="0" rIns="0" bIns="0" rtlCol="0" anchor="ctr"/>
+          <a:lstStyle/>
+          <a:p>
+            <a:pPr algn="l" indent="0" marL="0">
+              <a:buNone/>
+            </a:pPr>
+            <a:r>
+              <a:rPr lang="en-US" sz="1200" b="1" dirty="0">
+                <a:solidFill>
+                  <a:srgbClr val="2D1B1A"/>
+                </a:solidFill>
+                <a:latin typeface="Calibri" pitchFamily="34" charset="0"/>
+                <a:ea typeface="Calibri" pitchFamily="34" charset="-122"/>
+                <a:cs typeface="Calibri" pitchFamily="34" charset="-120"/>
+              </a:rPr>
+              <a:t>Transport</a:t>
+            </a:r>
+            <a:endParaRPr lang="en-US" sz="1200" dirty="0"/>
+          </a:p>
+        </p:txBody>
+      </p:sp>
+      <p:sp>
+        <p:nvSpPr>
+          <p:cNvPr id="33" name="Text 31"/>
+          <p:cNvSpPr/>
+          <p:nvPr/>
+        </p:nvSpPr>
+        <p:spPr>
+          <a:xfrm>
+            <a:off x="2286000" y="3840480"/>
+            <a:ext cx="1554480" cy="301752"/>
+          </a:xfrm>
+          <a:prstGeom prst="rect">
+            <a:avLst/>
+          </a:prstGeom>
+          <a:noFill/>
+          <a:ln/>
+        </p:spPr>
+        <p:txBody>
+          <a:bodyPr wrap="square" lIns="0" tIns="0" rIns="0" bIns="0" rtlCol="0" anchor="ctr"/>
+          <a:lstStyle/>
+          <a:p>
+            <a:pPr algn="r" indent="0" marL="0">
+              <a:buNone/>
+            </a:pPr>
+            <a:r>
+              <a:rPr lang="en-US" sz="1400" dirty="0">
+                <a:solidFill>
+                  <a:srgbClr val="2D1B1A"/>
+                </a:solidFill>
+                <a:latin typeface="Georgia" pitchFamily="34" charset="0"/>
+                <a:ea typeface="Georgia" pitchFamily="34" charset="-122"/>
+                <a:cs typeface="Georgia" pitchFamily="34" charset="-120"/>
+              </a:rPr>
+              <a:t>$826</a:t>
+            </a:r>
+            <a:endParaRPr lang="en-US" sz="1400" dirty="0"/>
+          </a:p>
+        </p:txBody>
+      </p:sp>
+      <p:sp>
+        <p:nvSpPr>
+          <p:cNvPr id="34" name="Text 32"/>
+          <p:cNvSpPr/>
+          <p:nvPr/>
+        </p:nvSpPr>
+        <p:spPr>
+          <a:xfrm>
+            <a:off x="3840480" y="3840480"/>
+            <a:ext cx="1554480" cy="301752"/>
+          </a:xfrm>
+          <a:prstGeom prst="rect">
+            <a:avLst/>
+          </a:prstGeom>
+          <a:noFill/>
+          <a:ln/>
+        </p:spPr>
+        <p:txBody>
+          <a:bodyPr wrap="square" lIns="0" tIns="0" rIns="0" bIns="0" rtlCol="0" anchor="ctr"/>
+          <a:lstStyle/>
+          <a:p>
+            <a:pPr algn="r" indent="0" marL="0">
+              <a:buNone/>
+            </a:pPr>
+            <a:r>
+              <a:rPr lang="en-US" sz="1400" dirty="0">
+                <a:solidFill>
+                  <a:srgbClr val="2D1B1A"/>
+                </a:solidFill>
+                <a:latin typeface="Georgia" pitchFamily="34" charset="0"/>
+                <a:ea typeface="Georgia" pitchFamily="34" charset="-122"/>
+                <a:cs typeface="Georgia" pitchFamily="34" charset="-120"/>
+              </a:rPr>
+              <a:t>$9,521</a:t>
+            </a:r>
+            <a:endParaRPr lang="en-US" sz="1400" dirty="0"/>
+          </a:p>
+        </p:txBody>
+      </p:sp>
+      <p:sp>
+        <p:nvSpPr>
+          <p:cNvPr id="35" name="Text 33"/>
+          <p:cNvSpPr/>
+          <p:nvPr/>
+        </p:nvSpPr>
+        <p:spPr>
+          <a:xfrm>
+            <a:off x="5394960" y="3840480"/>
+            <a:ext cx="1554480" cy="301752"/>
+          </a:xfrm>
+          <a:prstGeom prst="rect">
+            <a:avLst/>
+          </a:prstGeom>
+          <a:noFill/>
+          <a:ln/>
+        </p:spPr>
+        <p:txBody>
+          <a:bodyPr wrap="square" lIns="0" tIns="0" rIns="0" bIns="0" rtlCol="0" anchor="ctr"/>
+          <a:lstStyle/>
+          <a:p>
+            <a:pPr algn="r" indent="0" marL="0">
+              <a:buNone/>
+            </a:pPr>
+            <a:r>
+              <a:rPr lang="en-US" sz="1400" dirty="0">
+                <a:solidFill>
+                  <a:srgbClr val="2D1B1A"/>
+                </a:solidFill>
+                <a:latin typeface="Georgia" pitchFamily="34" charset="0"/>
+                <a:ea typeface="Georgia" pitchFamily="34" charset="-122"/>
+                <a:cs typeface="Georgia" pitchFamily="34" charset="-120"/>
+              </a:rPr>
+              <a:t>$31,677</a:t>
+            </a:r>
+            <a:endParaRPr lang="en-US" sz="1400" dirty="0"/>
+          </a:p>
+        </p:txBody>
+      </p:sp>
+      <p:sp>
+        <p:nvSpPr>
+          <p:cNvPr id="36" name="Text 34"/>
+          <p:cNvSpPr/>
+          <p:nvPr/>
+        </p:nvSpPr>
+        <p:spPr>
+          <a:xfrm>
+            <a:off x="6949440" y="3840480"/>
+            <a:ext cx="1554480" cy="301752"/>
+          </a:xfrm>
+          <a:prstGeom prst="rect">
+            <a:avLst/>
+          </a:prstGeom>
+          <a:noFill/>
+          <a:ln/>
+        </p:spPr>
+        <p:txBody>
+          <a:bodyPr wrap="square" lIns="0" tIns="0" rIns="0" bIns="0" rtlCol="0" anchor="ctr"/>
+          <a:lstStyle/>
+          <a:p>
+            <a:pPr algn="r" indent="0" marL="0">
+              <a:buNone/>
+            </a:pPr>
+            <a:r>
+              <a:rPr lang="en-US" sz="1400" b="1" dirty="0">
+                <a:solidFill>
+                  <a:srgbClr val="B85042"/>
+                </a:solidFill>
+                <a:latin typeface="Georgia" pitchFamily="34" charset="0"/>
+                <a:ea typeface="Georgia" pitchFamily="34" charset="-122"/>
+                <a:cs typeface="Georgia" pitchFamily="34" charset="-120"/>
+              </a:rPr>
+              <a:t>$64,745</a:t>
+            </a:r>
+            <a:endParaRPr lang="en-US" sz="1400" dirty="0"/>
+          </a:p>
+        </p:txBody>
+      </p:sp>
+      <p:sp>
+        <p:nvSpPr>
+          <p:cNvPr id="37" name="Text 35"/>
+          <p:cNvSpPr/>
+          <p:nvPr/>
+        </p:nvSpPr>
+        <p:spPr>
+          <a:xfrm>
+            <a:off x="640080" y="4142232"/>
+            <a:ext cx="1645920" cy="301752"/>
+          </a:xfrm>
+          <a:prstGeom prst="rect">
+            <a:avLst/>
+          </a:prstGeom>
+          <a:noFill/>
+          <a:ln/>
+        </p:spPr>
+        <p:txBody>
+          <a:bodyPr wrap="square" lIns="0" tIns="0" rIns="0" bIns="0" rtlCol="0" anchor="ctr"/>
+          <a:lstStyle/>
+          <a:p>
+            <a:pPr algn="l" indent="0" marL="0">
+              <a:buNone/>
+            </a:pPr>
+            <a:r>
+              <a:rPr lang="en-US" sz="1200" b="1" dirty="0">
+                <a:solidFill>
+                  <a:srgbClr val="B85042"/>
+                </a:solidFill>
+                <a:latin typeface="Calibri" pitchFamily="34" charset="0"/>
+                <a:ea typeface="Calibri" pitchFamily="34" charset="-122"/>
+                <a:cs typeface="Calibri" pitchFamily="34" charset="-120"/>
+              </a:rPr>
+              <a:t>Revenue</a:t>
+            </a:r>
+            <a:endParaRPr lang="en-US" sz="1200" dirty="0"/>
+          </a:p>
+        </p:txBody>
+      </p:sp>
+      <p:sp>
+        <p:nvSpPr>
+          <p:cNvPr id="38" name="Text 36"/>
+          <p:cNvSpPr/>
+          <p:nvPr/>
+        </p:nvSpPr>
+        <p:spPr>
+          <a:xfrm>
+            <a:off x="2286000" y="4142232"/>
+            <a:ext cx="1554480" cy="301752"/>
+          </a:xfrm>
+          <a:prstGeom prst="rect">
+            <a:avLst/>
+          </a:prstGeom>
+          <a:noFill/>
+          <a:ln/>
+        </p:spPr>
+        <p:txBody>
+          <a:bodyPr wrap="square" lIns="0" tIns="0" rIns="0" bIns="0" rtlCol="0" anchor="ctr"/>
+          <a:lstStyle/>
+          <a:p>
+            <a:pPr algn="r" indent="0" marL="0">
+              <a:buNone/>
+            </a:pPr>
+            <a:r>
+              <a:rPr lang="en-US" sz="1400" b="1" dirty="0">
+                <a:solidFill>
+                  <a:srgbClr val="B85042"/>
+                </a:solidFill>
+                <a:latin typeface="Georgia" pitchFamily="34" charset="0"/>
+                <a:ea typeface="Georgia" pitchFamily="34" charset="-122"/>
+                <a:cs typeface="Georgia" pitchFamily="34" charset="-120"/>
+              </a:rPr>
+              <a:t>$61,636</a:t>
+            </a:r>
+            <a:endParaRPr lang="en-US" sz="1400" dirty="0"/>
+          </a:p>
+        </p:txBody>
+      </p:sp>
+      <p:sp>
+        <p:nvSpPr>
+          <p:cNvPr id="39" name="Text 37"/>
+          <p:cNvSpPr/>
+          <p:nvPr/>
+        </p:nvSpPr>
+        <p:spPr>
+          <a:xfrm>
+            <a:off x="3840480" y="4142232"/>
+            <a:ext cx="1554480" cy="301752"/>
+          </a:xfrm>
+          <a:prstGeom prst="rect">
+            <a:avLst/>
+          </a:prstGeom>
+          <a:noFill/>
+          <a:ln/>
+        </p:spPr>
+        <p:txBody>
+          <a:bodyPr wrap="square" lIns="0" tIns="0" rIns="0" bIns="0" rtlCol="0" anchor="ctr"/>
+          <a:lstStyle/>
+          <a:p>
+            <a:pPr algn="r" indent="0" marL="0">
+              <a:buNone/>
+            </a:pPr>
+            <a:r>
+              <a:rPr lang="en-US" sz="1400" b="1" dirty="0">
+                <a:solidFill>
+                  <a:srgbClr val="B85042"/>
+                </a:solidFill>
+                <a:latin typeface="Georgia" pitchFamily="34" charset="0"/>
+                <a:ea typeface="Georgia" pitchFamily="34" charset="-122"/>
+                <a:cs typeface="Georgia" pitchFamily="34" charset="-120"/>
+              </a:rPr>
+              <a:t>$198,346</a:t>
+            </a:r>
+            <a:endParaRPr lang="en-US" sz="1400" dirty="0"/>
+          </a:p>
+        </p:txBody>
+      </p:sp>
+      <p:sp>
+        <p:nvSpPr>
+          <p:cNvPr id="40" name="Text 38"/>
+          <p:cNvSpPr/>
+          <p:nvPr/>
+        </p:nvSpPr>
+        <p:spPr>
+          <a:xfrm>
+            <a:off x="5394960" y="4142232"/>
+            <a:ext cx="1554480" cy="301752"/>
+          </a:xfrm>
+          <a:prstGeom prst="rect">
+            <a:avLst/>
+          </a:prstGeom>
+          <a:noFill/>
+          <a:ln/>
+        </p:spPr>
+        <p:txBody>
+          <a:bodyPr wrap="square" lIns="0" tIns="0" rIns="0" bIns="0" rtlCol="0" anchor="ctr"/>
+          <a:lstStyle/>
+          <a:p>
+            <a:pPr algn="r" indent="0" marL="0">
+              <a:buNone/>
+            </a:pPr>
+            <a:r>
+              <a:rPr lang="en-US" sz="1400" b="1" dirty="0">
+                <a:solidFill>
+                  <a:srgbClr val="B85042"/>
+                </a:solidFill>
+                <a:latin typeface="Georgia" pitchFamily="34" charset="0"/>
+                <a:ea typeface="Georgia" pitchFamily="34" charset="-122"/>
+                <a:cs typeface="Georgia" pitchFamily="34" charset="-120"/>
+              </a:rPr>
+              <a:t>$361,695</a:t>
+            </a:r>
+            <a:endParaRPr lang="en-US" sz="1400" dirty="0"/>
+          </a:p>
+        </p:txBody>
+      </p:sp>
+      <p:sp>
+        <p:nvSpPr>
+          <p:cNvPr id="41" name="Text 39"/>
+          <p:cNvSpPr/>
+          <p:nvPr/>
+        </p:nvSpPr>
+        <p:spPr>
+          <a:xfrm>
+            <a:off x="6949440" y="4142232"/>
+            <a:ext cx="1554480" cy="301752"/>
+          </a:xfrm>
+          <a:prstGeom prst="rect">
+            <a:avLst/>
+          </a:prstGeom>
+          <a:noFill/>
+          <a:ln/>
+        </p:spPr>
+        <p:txBody>
+          <a:bodyPr wrap="square" lIns="0" tIns="0" rIns="0" bIns="0" rtlCol="0" anchor="ctr"/>
+          <a:lstStyle/>
+          <a:p>
+            <a:pPr algn="r" indent="0" marL="0">
+              <a:buNone/>
+            </a:pPr>
+            <a:r>
+              <a:rPr lang="en-US" sz="1400" b="1" dirty="0">
+                <a:solidFill>
+                  <a:srgbClr val="B85042"/>
+                </a:solidFill>
+                <a:latin typeface="Georgia" pitchFamily="34" charset="0"/>
+                <a:ea typeface="Georgia" pitchFamily="34" charset="-122"/>
+                <a:cs typeface="Georgia" pitchFamily="34" charset="-120"/>
+              </a:rPr>
+              <a:t>$1,029,803</a:t>
+            </a:r>
+            <a:endParaRPr lang="en-US" sz="1400" dirty="0"/>
+          </a:p>
+        </p:txBody>
+      </p:sp>
+      <p:sp>
+        <p:nvSpPr>
+          <p:cNvPr id="42" name="Shape 40"/>
+          <p:cNvSpPr/>
+          <p:nvPr/>
+        </p:nvSpPr>
+        <p:spPr>
+          <a:xfrm>
+            <a:off x="640080" y="4142232"/>
+            <a:ext cx="7863840" cy="0"/>
+          </a:xfrm>
+          <a:prstGeom prst="line">
+            <a:avLst/>
+          </a:prstGeom>
+          <a:noFill/>
+          <a:ln w="12700">
+            <a:solidFill>
+              <a:srgbClr val="B85042"/>
+            </a:solidFill>
+            <a:prstDash val="solid"/>
+          </a:ln>
+        </p:spPr>
+      </p:sp>
+      <p:sp>
+        <p:nvSpPr>
+          <p:cNvPr id="43" name="Text 41"/>
+          <p:cNvSpPr/>
+          <p:nvPr/>
+        </p:nvSpPr>
+        <p:spPr>
+          <a:xfrm>
+            <a:off x="640080" y="4526280"/>
             <a:ext cx="7863840" cy="274320"/>
           </a:xfrm>
           <a:prstGeom prst="rect">
@@ -8129,7 +8991,7 @@
               <a:buNone/>
             </a:pPr>
             <a:r>
-              <a:rPr lang="en-US" sz="1100" b="1" i="1" dirty="0">
+              <a:rPr lang="en-US" sz="1050" b="1" i="1" dirty="0">
                 <a:solidFill>
                   <a:srgbClr val="2D1B1A"/>
                 </a:solidFill>
@@ -8137,13 +8999,13 @@
                 <a:ea typeface="Calibri" pitchFamily="34" charset="-122"/>
                 <a:cs typeface="Calibri" pitchFamily="34" charset="-120"/>
               </a:rPr>
-              <a:t>Path to break-even:  </a:t>
-            </a:r>
-            <a:pPr indent="0" marL="0">
-              <a:buNone/>
-            </a:pPr>
-            <a:r>
-              <a:rPr lang="en-US" sz="1100" i="1" dirty="0">
+              <a:t>Surplus &amp; funding:  </a:t>
+            </a:r>
+            <a:pPr indent="0" marL="0">
+              <a:buNone/>
+            </a:pPr>
+            <a:r>
+              <a:rPr lang="en-US" sz="1050" i="1" dirty="0">
                 <a:solidFill>
                   <a:srgbClr val="7A4F47"/>
                 </a:solidFill>
@@ -8151,15 +9013,15 @@
                 <a:ea typeface="Calibri" pitchFamily="34" charset="-122"/>
                 <a:cs typeface="Calibri" pitchFamily="34" charset="-120"/>
               </a:rPr>
-              <a:t>3 engaged houses ≈ $130k/yr (covers infra + 2 salaries).  6 houses ≈ $260k/yr — default-alive.</a:t>
-            </a:r>
-            <a:endParaRPr lang="en-US" sz="1100" dirty="0"/>
-          </a:p>
-        </p:txBody>
-      </p:sp>
-      <p:sp>
-        <p:nvSpPr>
-          <p:cNvPr id="23" name="Text 21"/>
+              <a:t>+$12,795 Y1 surplus (a thin ~3.5-week opex cushion) building to a 5-yr cumulative surplus of $346,583 — self-funded with a 2–3 month working-capital buffer, no external equity.</a:t>
+            </a:r>
+            <a:endParaRPr lang="en-US" sz="1050" dirty="0"/>
+          </a:p>
+        </p:txBody>
+      </p:sp>
+      <p:sp>
+        <p:nvSpPr>
+          <p:cNvPr id="44" name="Text 42"/>
           <p:cNvSpPr/>
           <p:nvPr/>
         </p:nvSpPr>
@@ -8198,7 +9060,7 @@
       </p:sp>
       <p:sp>
         <p:nvSpPr>
-          <p:cNvPr id="24" name="Text 22"/>
+          <p:cNvPr id="45" name="Text 43"/>
           <p:cNvSpPr/>
           <p:nvPr/>
         </p:nvSpPr>
@@ -8359,7 +9221,7 @@
                 <a:ea typeface="Georgia" pitchFamily="34" charset="-122"/>
                 <a:cs typeface="Georgia" pitchFamily="34" charset="-120"/>
               </a:rPr>
-              <a:t>Founder-led, relationship-led, Paynow-channelled.</a:t>
+              <a:t>Anchors first, then a self-serve onboarding wizard.</a:t>
             </a:r>
             <a:endParaRPr lang="en-US" sz="3200" dirty="0"/>
           </a:p>
@@ -8398,7 +9260,7 @@
                 <a:ea typeface="Calibri" pitchFamily="34" charset="-122"/>
                 <a:cs typeface="Calibri" pitchFamily="34" charset="-120"/>
               </a:rPr>
-              <a:t>Three engagements in year one. Six in year two. Operations capacity gates everything — sales velocity is deliberately throttled.</a:t>
+              <a:t>Five houses live by end of Year 1, ramping to 20 by Year 5 — about a third of the market. The wizard turns each new house into a ~6-minute, admin-approved tenant, so growth rides on house count + transport, not bespoke labor.</a:t>
             </a:r>
             <a:endParaRPr lang="en-US" sz="1300" dirty="0"/>
           </a:p>
@@ -8437,7 +9299,7 @@
                 <a:ea typeface="Calibri" pitchFamily="34" charset="-122"/>
                 <a:cs typeface="Calibri" pitchFamily="34" charset="-120"/>
               </a:rPr>
-              <a:t>Q3 2026</a:t>
+              <a:t>Year 1</a:t>
             </a:r>
             <a:endParaRPr lang="en-US" sz="1100" dirty="0"/>
           </a:p>
@@ -8476,7 +9338,7 @@
                 <a:ea typeface="Georgia" pitchFamily="34" charset="-122"/>
                 <a:cs typeface="Georgia" pitchFamily="34" charset="-120"/>
               </a:rPr>
-              <a:t>Pilot signed</a:t>
+              <a:t>Anchors signed</a:t>
             </a:r>
             <a:endParaRPr lang="en-US" sz="2000" dirty="0"/>
           </a:p>
@@ -8515,7 +9377,7 @@
                 <a:ea typeface="Calibri" pitchFamily="34" charset="-122"/>
                 <a:cs typeface="Calibri" pitchFamily="34" charset="-120"/>
               </a:rPr>
-              <a:t>One Harare-area auction house. Paid engagement, discounted from list. Reference customer.</a:t>
+              <a:t>5 houses live — incl. 3 of ~8 Tier A anchors. Wizard live: /operators → admin approval → RLS-isolated tenant.</a:t>
             </a:r>
             <a:endParaRPr lang="en-US" sz="1200" dirty="0"/>
           </a:p>
@@ -8554,7 +9416,7 @@
                 <a:ea typeface="Calibri" pitchFamily="34" charset="-122"/>
                 <a:cs typeface="Calibri" pitchFamily="34" charset="-120"/>
               </a:rPr>
-              <a:t>Q1–Q2 2027</a:t>
+              <a:t>Years 2–3</a:t>
             </a:r>
             <a:endParaRPr lang="en-US" sz="1100" dirty="0"/>
           </a:p>
@@ -8593,7 +9455,7 @@
                 <a:ea typeface="Georgia" pitchFamily="34" charset="-122"/>
                 <a:cs typeface="Georgia" pitchFamily="34" charset="-120"/>
               </a:rPr>
-              <a:t>Category, not customer</a:t>
+              <a:t>The category</a:t>
             </a:r>
             <a:endParaRPr lang="en-US" sz="2000" dirty="0"/>
           </a:p>
@@ -8632,7 +9494,7 @@
                 <a:ea typeface="Calibri" pitchFamily="34" charset="-122"/>
                 <a:cs typeface="Calibri" pitchFamily="34" charset="-120"/>
               </a:rPr>
-              <a:t>Engagements 2 + 3. First case study. Paynow formalises us as their vertical solution.</a:t>
+              <a:t>8 → 12 houses live. Case studies compound. Paynow formalises us as their vertical livestock solution.</a:t>
             </a:r>
             <a:endParaRPr lang="en-US" sz="1200" dirty="0"/>
           </a:p>
@@ -8671,7 +9533,7 @@
                 <a:ea typeface="Calibri" pitchFamily="34" charset="-122"/>
                 <a:cs typeface="Calibri" pitchFamily="34" charset="-120"/>
               </a:rPr>
-              <a:t>Q4 2028</a:t>
+              <a:t>Years 4–5</a:t>
             </a:r>
             <a:endParaRPr lang="en-US" sz="1100" dirty="0"/>
           </a:p>
@@ -8710,7 +9572,7 @@
                 <a:ea typeface="Georgia" pitchFamily="34" charset="-122"/>
                 <a:cs typeface="Georgia" pitchFamily="34" charset="-120"/>
               </a:rPr>
-              <a:t>Ten houses, default-alive</a:t>
+              <a:t>20 houses, +transport</a:t>
             </a:r>
             <a:endParaRPr lang="en-US" sz="2000" dirty="0"/>
           </a:p>
@@ -8749,7 +9611,7 @@
                 <a:ea typeface="Calibri" pitchFamily="34" charset="-122"/>
                 <a:cs typeface="Calibri" pitchFamily="34" charset="-120"/>
               </a:rPr>
-              <a:t>$250k+ recurring on Zimbabwe alone. Discovery begins in second market.</a:t>
+              <a:t>16 → 20 live. $1.03M 5-yr revenue, $346,583 cumulative surplus. Consumer transport line ramps the B2B2C upside.</a:t>
             </a:r>
             <a:endParaRPr lang="en-US" sz="1200" dirty="0"/>
           </a:p>
